--- a/presentation.pptx
+++ b/presentation.pptx
@@ -4,6 +4,9 @@
   <p:sldMasterIdLst>
     <p:sldMasterId id="2147483648" r:id="rId1"/>
   </p:sldMasterIdLst>
+  <p:sldIdLst>
+    <p:sldId id="256" r:id="rId2"/>
+  </p:sldIdLst>
   <p:sldSz cx="9144000" cy="6858000" type="screen4x3"/>
   <p:notesSz cx="6858000" cy="9144000"/>
   <p:defaultTextStyle>
@@ -101,6 +104,22 @@
       </a:defRPr>
     </a:lvl9pPr>
   </p:defaultTextStyle>
+  <p:extLst>
+    <p:ext uri="{EFAFB233-063F-42B5-8137-9DF3F51BA10A}">
+      <p15:sldGuideLst xmlns:p15="http://schemas.microsoft.com/office/powerpoint/2012/main">
+        <p15:guide id="1" orient="horz" pos="2160">
+          <p15:clr>
+            <a:srgbClr val="A4A3A4"/>
+          </p15:clr>
+        </p15:guide>
+        <p15:guide id="2" pos="2880">
+          <p15:clr>
+            <a:srgbClr val="A4A3A4"/>
+          </p15:clr>
+        </p15:guide>
+      </p15:sldGuideLst>
+    </p:ext>
+  </p:extLst>
 </p:presentation>
 </file>
 
@@ -142,10 +161,9 @@
           <a:lstStyle/>
           <a:p>
             <a:r>
-              <a:rPr lang="en-US" smtClean="0"/>
+              <a:rPr lang="en-US"/>
               <a:t>Click to edit Master title style</a:t>
             </a:r>
-            <a:endParaRPr lang="en-US"/>
           </a:p>
         </p:txBody>
       </p:sp>
@@ -261,10 +279,9 @@
           </a:lstStyle>
           <a:p>
             <a:r>
-              <a:rPr lang="en-US" smtClean="0"/>
+              <a:rPr lang="en-US"/>
               <a:t>Click to edit Master subtitle style</a:t>
             </a:r>
-            <a:endParaRPr lang="en-US"/>
           </a:p>
         </p:txBody>
       </p:sp>
@@ -285,7 +302,7 @@
           <a:p>
             <a:fld id="{5BCAD085-E8A6-8845-BD4E-CB4CCA059FC4}" type="datetimeFigureOut">
               <a:rPr lang="en-US" smtClean="0"/>
-              <a:t>1/27/13</a:t>
+              <a:t>2/25/26</a:t>
             </a:fld>
             <a:endParaRPr lang="en-US"/>
           </a:p>
@@ -379,10 +396,9 @@
           <a:lstStyle/>
           <a:p>
             <a:r>
-              <a:rPr lang="en-US" smtClean="0"/>
+              <a:rPr lang="en-US"/>
               <a:t>Click to edit Master title style</a:t>
             </a:r>
-            <a:endParaRPr lang="en-US"/>
           </a:p>
         </p:txBody>
       </p:sp>
@@ -403,38 +419,37 @@
           <a:p>
             <a:pPr lvl="0"/>
             <a:r>
-              <a:rPr lang="en-US" smtClean="0"/>
+              <a:rPr lang="en-US"/>
               <a:t>Click to edit Master text styles</a:t>
             </a:r>
           </a:p>
           <a:p>
             <a:pPr lvl="1"/>
             <a:r>
-              <a:rPr lang="en-US" smtClean="0"/>
+              <a:rPr lang="en-US"/>
               <a:t>Second level</a:t>
             </a:r>
           </a:p>
           <a:p>
             <a:pPr lvl="2"/>
             <a:r>
-              <a:rPr lang="en-US" smtClean="0"/>
+              <a:rPr lang="en-US"/>
               <a:t>Third level</a:t>
             </a:r>
           </a:p>
           <a:p>
             <a:pPr lvl="3"/>
             <a:r>
-              <a:rPr lang="en-US" smtClean="0"/>
+              <a:rPr lang="en-US"/>
               <a:t>Fourth level</a:t>
             </a:r>
           </a:p>
           <a:p>
             <a:pPr lvl="4"/>
             <a:r>
-              <a:rPr lang="en-US" smtClean="0"/>
+              <a:rPr lang="en-US"/>
               <a:t>Fifth level</a:t>
             </a:r>
-            <a:endParaRPr lang="en-US"/>
           </a:p>
         </p:txBody>
       </p:sp>
@@ -455,7 +470,7 @@
           <a:p>
             <a:fld id="{5BCAD085-E8A6-8845-BD4E-CB4CCA059FC4}" type="datetimeFigureOut">
               <a:rPr lang="en-US" smtClean="0"/>
-              <a:t>1/27/13</a:t>
+              <a:t>2/25/26</a:t>
             </a:fld>
             <a:endParaRPr lang="en-US"/>
           </a:p>
@@ -554,10 +569,9 @@
           <a:lstStyle/>
           <a:p>
             <a:r>
-              <a:rPr lang="en-US" smtClean="0"/>
+              <a:rPr lang="en-US"/>
               <a:t>Click to edit Master title style</a:t>
             </a:r>
-            <a:endParaRPr lang="en-US"/>
           </a:p>
         </p:txBody>
       </p:sp>
@@ -583,38 +597,37 @@
           <a:p>
             <a:pPr lvl="0"/>
             <a:r>
-              <a:rPr lang="en-US" smtClean="0"/>
+              <a:rPr lang="en-US"/>
               <a:t>Click to edit Master text styles</a:t>
             </a:r>
           </a:p>
           <a:p>
             <a:pPr lvl="1"/>
             <a:r>
-              <a:rPr lang="en-US" smtClean="0"/>
+              <a:rPr lang="en-US"/>
               <a:t>Second level</a:t>
             </a:r>
           </a:p>
           <a:p>
             <a:pPr lvl="2"/>
             <a:r>
-              <a:rPr lang="en-US" smtClean="0"/>
+              <a:rPr lang="en-US"/>
               <a:t>Third level</a:t>
             </a:r>
           </a:p>
           <a:p>
             <a:pPr lvl="3"/>
             <a:r>
-              <a:rPr lang="en-US" smtClean="0"/>
+              <a:rPr lang="en-US"/>
               <a:t>Fourth level</a:t>
             </a:r>
           </a:p>
           <a:p>
             <a:pPr lvl="4"/>
             <a:r>
-              <a:rPr lang="en-US" smtClean="0"/>
+              <a:rPr lang="en-US"/>
               <a:t>Fifth level</a:t>
             </a:r>
-            <a:endParaRPr lang="en-US"/>
           </a:p>
         </p:txBody>
       </p:sp>
@@ -635,7 +648,7 @@
           <a:p>
             <a:fld id="{5BCAD085-E8A6-8845-BD4E-CB4CCA059FC4}" type="datetimeFigureOut">
               <a:rPr lang="en-US" smtClean="0"/>
-              <a:t>1/27/13</a:t>
+              <a:t>2/25/26</a:t>
             </a:fld>
             <a:endParaRPr lang="en-US"/>
           </a:p>
@@ -729,10 +742,9 @@
           <a:lstStyle/>
           <a:p>
             <a:r>
-              <a:rPr lang="en-US" smtClean="0"/>
+              <a:rPr lang="en-US"/>
               <a:t>Click to edit Master title style</a:t>
             </a:r>
-            <a:endParaRPr lang="en-US"/>
           </a:p>
         </p:txBody>
       </p:sp>
@@ -753,38 +765,37 @@
           <a:p>
             <a:pPr lvl="0"/>
             <a:r>
-              <a:rPr lang="en-US" smtClean="0"/>
+              <a:rPr lang="en-US"/>
               <a:t>Click to edit Master text styles</a:t>
             </a:r>
           </a:p>
           <a:p>
             <a:pPr lvl="1"/>
             <a:r>
-              <a:rPr lang="en-US" smtClean="0"/>
+              <a:rPr lang="en-US"/>
               <a:t>Second level</a:t>
             </a:r>
           </a:p>
           <a:p>
             <a:pPr lvl="2"/>
             <a:r>
-              <a:rPr lang="en-US" smtClean="0"/>
+              <a:rPr lang="en-US"/>
               <a:t>Third level</a:t>
             </a:r>
           </a:p>
           <a:p>
             <a:pPr lvl="3"/>
             <a:r>
-              <a:rPr lang="en-US" smtClean="0"/>
+              <a:rPr lang="en-US"/>
               <a:t>Fourth level</a:t>
             </a:r>
           </a:p>
           <a:p>
             <a:pPr lvl="4"/>
             <a:r>
-              <a:rPr lang="en-US" smtClean="0"/>
+              <a:rPr lang="en-US"/>
               <a:t>Fifth level</a:t>
             </a:r>
-            <a:endParaRPr lang="en-US"/>
           </a:p>
         </p:txBody>
       </p:sp>
@@ -805,7 +816,7 @@
           <a:p>
             <a:fld id="{5BCAD085-E8A6-8845-BD4E-CB4CCA059FC4}" type="datetimeFigureOut">
               <a:rPr lang="en-US" smtClean="0"/>
-              <a:t>1/27/13</a:t>
+              <a:t>2/25/26</a:t>
             </a:fld>
             <a:endParaRPr lang="en-US"/>
           </a:p>
@@ -908,10 +919,9 @@
           </a:lstStyle>
           <a:p>
             <a:r>
-              <a:rPr lang="en-US" smtClean="0"/>
+              <a:rPr lang="en-US"/>
               <a:t>Click to edit Master title style</a:t>
             </a:r>
-            <a:endParaRPr lang="en-US"/>
           </a:p>
         </p:txBody>
       </p:sp>
@@ -1028,7 +1038,7 @@
           <a:p>
             <a:pPr lvl="0"/>
             <a:r>
-              <a:rPr lang="en-US" smtClean="0"/>
+              <a:rPr lang="en-US"/>
               <a:t>Click to edit Master text styles</a:t>
             </a:r>
           </a:p>
@@ -1051,7 +1061,7 @@
           <a:p>
             <a:fld id="{5BCAD085-E8A6-8845-BD4E-CB4CCA059FC4}" type="datetimeFigureOut">
               <a:rPr lang="en-US" smtClean="0"/>
-              <a:t>1/27/13</a:t>
+              <a:t>2/25/26</a:t>
             </a:fld>
             <a:endParaRPr lang="en-US"/>
           </a:p>
@@ -1145,10 +1155,9 @@
           <a:lstStyle/>
           <a:p>
             <a:r>
-              <a:rPr lang="en-US" smtClean="0"/>
+              <a:rPr lang="en-US"/>
               <a:t>Click to edit Master title style</a:t>
             </a:r>
-            <a:endParaRPr lang="en-US"/>
           </a:p>
         </p:txBody>
       </p:sp>
@@ -1202,38 +1211,37 @@
           <a:p>
             <a:pPr lvl="0"/>
             <a:r>
-              <a:rPr lang="en-US" smtClean="0"/>
+              <a:rPr lang="en-US"/>
               <a:t>Click to edit Master text styles</a:t>
             </a:r>
           </a:p>
           <a:p>
             <a:pPr lvl="1"/>
             <a:r>
-              <a:rPr lang="en-US" smtClean="0"/>
+              <a:rPr lang="en-US"/>
               <a:t>Second level</a:t>
             </a:r>
           </a:p>
           <a:p>
             <a:pPr lvl="2"/>
             <a:r>
-              <a:rPr lang="en-US" smtClean="0"/>
+              <a:rPr lang="en-US"/>
               <a:t>Third level</a:t>
             </a:r>
           </a:p>
           <a:p>
             <a:pPr lvl="3"/>
             <a:r>
-              <a:rPr lang="en-US" smtClean="0"/>
+              <a:rPr lang="en-US"/>
               <a:t>Fourth level</a:t>
             </a:r>
           </a:p>
           <a:p>
             <a:pPr lvl="4"/>
             <a:r>
-              <a:rPr lang="en-US" smtClean="0"/>
+              <a:rPr lang="en-US"/>
               <a:t>Fifth level</a:t>
             </a:r>
-            <a:endParaRPr lang="en-US"/>
           </a:p>
         </p:txBody>
       </p:sp>
@@ -1287,38 +1295,37 @@
           <a:p>
             <a:pPr lvl="0"/>
             <a:r>
-              <a:rPr lang="en-US" smtClean="0"/>
+              <a:rPr lang="en-US"/>
               <a:t>Click to edit Master text styles</a:t>
             </a:r>
           </a:p>
           <a:p>
             <a:pPr lvl="1"/>
             <a:r>
-              <a:rPr lang="en-US" smtClean="0"/>
+              <a:rPr lang="en-US"/>
               <a:t>Second level</a:t>
             </a:r>
           </a:p>
           <a:p>
             <a:pPr lvl="2"/>
             <a:r>
-              <a:rPr lang="en-US" smtClean="0"/>
+              <a:rPr lang="en-US"/>
               <a:t>Third level</a:t>
             </a:r>
           </a:p>
           <a:p>
             <a:pPr lvl="3"/>
             <a:r>
-              <a:rPr lang="en-US" smtClean="0"/>
+              <a:rPr lang="en-US"/>
               <a:t>Fourth level</a:t>
             </a:r>
           </a:p>
           <a:p>
             <a:pPr lvl="4"/>
             <a:r>
-              <a:rPr lang="en-US" smtClean="0"/>
+              <a:rPr lang="en-US"/>
               <a:t>Fifth level</a:t>
             </a:r>
-            <a:endParaRPr lang="en-US"/>
           </a:p>
         </p:txBody>
       </p:sp>
@@ -1339,7 +1346,7 @@
           <a:p>
             <a:fld id="{5BCAD085-E8A6-8845-BD4E-CB4CCA059FC4}" type="datetimeFigureOut">
               <a:rPr lang="en-US" smtClean="0"/>
-              <a:t>1/27/13</a:t>
+              <a:t>2/25/26</a:t>
             </a:fld>
             <a:endParaRPr lang="en-US"/>
           </a:p>
@@ -1437,10 +1444,9 @@
           </a:lstStyle>
           <a:p>
             <a:r>
-              <a:rPr lang="en-US" smtClean="0"/>
+              <a:rPr lang="en-US"/>
               <a:t>Click to edit Master title style</a:t>
             </a:r>
-            <a:endParaRPr lang="en-US"/>
           </a:p>
         </p:txBody>
       </p:sp>
@@ -1503,7 +1509,7 @@
           <a:p>
             <a:pPr lvl="0"/>
             <a:r>
-              <a:rPr lang="en-US" smtClean="0"/>
+              <a:rPr lang="en-US"/>
               <a:t>Click to edit Master text styles</a:t>
             </a:r>
           </a:p>
@@ -1559,38 +1565,37 @@
           <a:p>
             <a:pPr lvl="0"/>
             <a:r>
-              <a:rPr lang="en-US" smtClean="0"/>
+              <a:rPr lang="en-US"/>
               <a:t>Click to edit Master text styles</a:t>
             </a:r>
           </a:p>
           <a:p>
             <a:pPr lvl="1"/>
             <a:r>
-              <a:rPr lang="en-US" smtClean="0"/>
+              <a:rPr lang="en-US"/>
               <a:t>Second level</a:t>
             </a:r>
           </a:p>
           <a:p>
             <a:pPr lvl="2"/>
             <a:r>
-              <a:rPr lang="en-US" smtClean="0"/>
+              <a:rPr lang="en-US"/>
               <a:t>Third level</a:t>
             </a:r>
           </a:p>
           <a:p>
             <a:pPr lvl="3"/>
             <a:r>
-              <a:rPr lang="en-US" smtClean="0"/>
+              <a:rPr lang="en-US"/>
               <a:t>Fourth level</a:t>
             </a:r>
           </a:p>
           <a:p>
             <a:pPr lvl="4"/>
             <a:r>
-              <a:rPr lang="en-US" smtClean="0"/>
+              <a:rPr lang="en-US"/>
               <a:t>Fifth level</a:t>
             </a:r>
-            <a:endParaRPr lang="en-US"/>
           </a:p>
         </p:txBody>
       </p:sp>
@@ -1653,7 +1658,7 @@
           <a:p>
             <a:pPr lvl="0"/>
             <a:r>
-              <a:rPr lang="en-US" smtClean="0"/>
+              <a:rPr lang="en-US"/>
               <a:t>Click to edit Master text styles</a:t>
             </a:r>
           </a:p>
@@ -1709,38 +1714,37 @@
           <a:p>
             <a:pPr lvl="0"/>
             <a:r>
-              <a:rPr lang="en-US" smtClean="0"/>
+              <a:rPr lang="en-US"/>
               <a:t>Click to edit Master text styles</a:t>
             </a:r>
           </a:p>
           <a:p>
             <a:pPr lvl="1"/>
             <a:r>
-              <a:rPr lang="en-US" smtClean="0"/>
+              <a:rPr lang="en-US"/>
               <a:t>Second level</a:t>
             </a:r>
           </a:p>
           <a:p>
             <a:pPr lvl="2"/>
             <a:r>
-              <a:rPr lang="en-US" smtClean="0"/>
+              <a:rPr lang="en-US"/>
               <a:t>Third level</a:t>
             </a:r>
           </a:p>
           <a:p>
             <a:pPr lvl="3"/>
             <a:r>
-              <a:rPr lang="en-US" smtClean="0"/>
+              <a:rPr lang="en-US"/>
               <a:t>Fourth level</a:t>
             </a:r>
           </a:p>
           <a:p>
             <a:pPr lvl="4"/>
             <a:r>
-              <a:rPr lang="en-US" smtClean="0"/>
+              <a:rPr lang="en-US"/>
               <a:t>Fifth level</a:t>
             </a:r>
-            <a:endParaRPr lang="en-US"/>
           </a:p>
         </p:txBody>
       </p:sp>
@@ -1761,7 +1765,7 @@
           <a:p>
             <a:fld id="{5BCAD085-E8A6-8845-BD4E-CB4CCA059FC4}" type="datetimeFigureOut">
               <a:rPr lang="en-US" smtClean="0"/>
-              <a:t>1/27/13</a:t>
+              <a:t>2/25/26</a:t>
             </a:fld>
             <a:endParaRPr lang="en-US"/>
           </a:p>
@@ -1855,10 +1859,9 @@
           <a:lstStyle/>
           <a:p>
             <a:r>
-              <a:rPr lang="en-US" smtClean="0"/>
+              <a:rPr lang="en-US"/>
               <a:t>Click to edit Master title style</a:t>
             </a:r>
-            <a:endParaRPr lang="en-US"/>
           </a:p>
         </p:txBody>
       </p:sp>
@@ -1879,7 +1882,7 @@
           <a:p>
             <a:fld id="{5BCAD085-E8A6-8845-BD4E-CB4CCA059FC4}" type="datetimeFigureOut">
               <a:rPr lang="en-US" smtClean="0"/>
-              <a:t>1/27/13</a:t>
+              <a:t>2/25/26</a:t>
             </a:fld>
             <a:endParaRPr lang="en-US"/>
           </a:p>
@@ -1974,7 +1977,7 @@
           <a:p>
             <a:fld id="{5BCAD085-E8A6-8845-BD4E-CB4CCA059FC4}" type="datetimeFigureOut">
               <a:rPr lang="en-US" smtClean="0"/>
-              <a:t>1/27/13</a:t>
+              <a:t>2/25/26</a:t>
             </a:fld>
             <a:endParaRPr lang="en-US"/>
           </a:p>
@@ -2077,10 +2080,9 @@
           </a:lstStyle>
           <a:p>
             <a:r>
-              <a:rPr lang="en-US" smtClean="0"/>
+              <a:rPr lang="en-US"/>
               <a:t>Click to edit Master title style</a:t>
             </a:r>
-            <a:endParaRPr lang="en-US"/>
           </a:p>
         </p:txBody>
       </p:sp>
@@ -2134,38 +2136,37 @@
           <a:p>
             <a:pPr lvl="0"/>
             <a:r>
-              <a:rPr lang="en-US" smtClean="0"/>
+              <a:rPr lang="en-US"/>
               <a:t>Click to edit Master text styles</a:t>
             </a:r>
           </a:p>
           <a:p>
             <a:pPr lvl="1"/>
             <a:r>
-              <a:rPr lang="en-US" smtClean="0"/>
+              <a:rPr lang="en-US"/>
               <a:t>Second level</a:t>
             </a:r>
           </a:p>
           <a:p>
             <a:pPr lvl="2"/>
             <a:r>
-              <a:rPr lang="en-US" smtClean="0"/>
+              <a:rPr lang="en-US"/>
               <a:t>Third level</a:t>
             </a:r>
           </a:p>
           <a:p>
             <a:pPr lvl="3"/>
             <a:r>
-              <a:rPr lang="en-US" smtClean="0"/>
+              <a:rPr lang="en-US"/>
               <a:t>Fourth level</a:t>
             </a:r>
           </a:p>
           <a:p>
             <a:pPr lvl="4"/>
             <a:r>
-              <a:rPr lang="en-US" smtClean="0"/>
+              <a:rPr lang="en-US"/>
               <a:t>Fifth level</a:t>
             </a:r>
-            <a:endParaRPr lang="en-US"/>
           </a:p>
         </p:txBody>
       </p:sp>
@@ -2228,7 +2229,7 @@
           <a:p>
             <a:pPr lvl="0"/>
             <a:r>
-              <a:rPr lang="en-US" smtClean="0"/>
+              <a:rPr lang="en-US"/>
               <a:t>Click to edit Master text styles</a:t>
             </a:r>
           </a:p>
@@ -2251,7 +2252,7 @@
           <a:p>
             <a:fld id="{5BCAD085-E8A6-8845-BD4E-CB4CCA059FC4}" type="datetimeFigureOut">
               <a:rPr lang="en-US" smtClean="0"/>
-              <a:t>1/27/13</a:t>
+              <a:t>2/25/26</a:t>
             </a:fld>
             <a:endParaRPr lang="en-US"/>
           </a:p>
@@ -2354,10 +2355,9 @@
           </a:lstStyle>
           <a:p>
             <a:r>
-              <a:rPr lang="en-US" smtClean="0"/>
+              <a:rPr lang="en-US"/>
               <a:t>Click to edit Master title style</a:t>
             </a:r>
-            <a:endParaRPr lang="en-US"/>
           </a:p>
         </p:txBody>
       </p:sp>
@@ -2481,7 +2481,7 @@
           <a:p>
             <a:pPr lvl="0"/>
             <a:r>
-              <a:rPr lang="en-US" smtClean="0"/>
+              <a:rPr lang="en-US"/>
               <a:t>Click to edit Master text styles</a:t>
             </a:r>
           </a:p>
@@ -2504,7 +2504,7 @@
           <a:p>
             <a:fld id="{5BCAD085-E8A6-8845-BD4E-CB4CCA059FC4}" type="datetimeFigureOut">
               <a:rPr lang="en-US" smtClean="0"/>
-              <a:t>1/27/13</a:t>
+              <a:t>2/25/26</a:t>
             </a:fld>
             <a:endParaRPr lang="en-US"/>
           </a:p>
@@ -2613,10 +2613,9 @@
           <a:lstStyle/>
           <a:p>
             <a:r>
-              <a:rPr lang="en-US" smtClean="0"/>
+              <a:rPr lang="en-US"/>
               <a:t>Click to edit Master title style</a:t>
             </a:r>
-            <a:endParaRPr lang="en-US"/>
           </a:p>
         </p:txBody>
       </p:sp>
@@ -2647,38 +2646,37 @@
           <a:p>
             <a:pPr lvl="0"/>
             <a:r>
-              <a:rPr lang="en-US" smtClean="0"/>
+              <a:rPr lang="en-US"/>
               <a:t>Click to edit Master text styles</a:t>
             </a:r>
           </a:p>
           <a:p>
             <a:pPr lvl="1"/>
             <a:r>
-              <a:rPr lang="en-US" smtClean="0"/>
+              <a:rPr lang="en-US"/>
               <a:t>Second level</a:t>
             </a:r>
           </a:p>
           <a:p>
             <a:pPr lvl="2"/>
             <a:r>
-              <a:rPr lang="en-US" smtClean="0"/>
+              <a:rPr lang="en-US"/>
               <a:t>Third level</a:t>
             </a:r>
           </a:p>
           <a:p>
             <a:pPr lvl="3"/>
             <a:r>
-              <a:rPr lang="en-US" smtClean="0"/>
+              <a:rPr lang="en-US"/>
               <a:t>Fourth level</a:t>
             </a:r>
           </a:p>
           <a:p>
             <a:pPr lvl="4"/>
             <a:r>
-              <a:rPr lang="en-US" smtClean="0"/>
+              <a:rPr lang="en-US"/>
               <a:t>Fifth level</a:t>
             </a:r>
-            <a:endParaRPr lang="en-US"/>
           </a:p>
         </p:txBody>
       </p:sp>
@@ -2717,7 +2715,7 @@
           <a:p>
             <a:fld id="{5BCAD085-E8A6-8845-BD4E-CB4CCA059FC4}" type="datetimeFigureOut">
               <a:rPr lang="en-US" smtClean="0"/>
-              <a:t>1/27/13</a:t>
+              <a:t>2/25/26</a:t>
             </a:fld>
             <a:endParaRPr lang="en-US"/>
           </a:p>
@@ -3073,6 +3071,89 @@
     </p:otherStyle>
   </p:txStyles>
 </p:sldMaster>
+</file>
+
+<file path=ppt/slides/slide1.xml><?xml version="1.0" encoding="utf-8"?>
+<p:sld xmlns:a="http://schemas.openxmlformats.org/drawingml/2006/main" xmlns:r="http://schemas.openxmlformats.org/officeDocument/2006/relationships" xmlns:p="http://schemas.openxmlformats.org/presentationml/2006/main">
+  <p:cSld>
+    <p:spTree>
+      <p:nvGrpSpPr>
+        <p:cNvPr id="1" name=""/>
+        <p:cNvGrpSpPr/>
+        <p:nvPr/>
+      </p:nvGrpSpPr>
+      <p:grpSpPr>
+        <a:xfrm>
+          <a:off x="0" y="0"/>
+          <a:ext cx="0" cy="0"/>
+          <a:chOff x="0" y="0"/>
+          <a:chExt cx="0" cy="0"/>
+        </a:xfrm>
+      </p:grpSpPr>
+      <p:sp>
+        <p:nvSpPr>
+          <p:cNvPr id="2" name="Title 1">
+            <a:extLst>
+              <a:ext uri="{FF2B5EF4-FFF2-40B4-BE49-F238E27FC236}">
+                <a16:creationId xmlns:a16="http://schemas.microsoft.com/office/drawing/2014/main" id="{77410BE4-1BDC-8924-B83D-5C0B05640D75}"/>
+              </a:ext>
+            </a:extLst>
+          </p:cNvPr>
+          <p:cNvSpPr>
+            <a:spLocks noGrp="1"/>
+          </p:cNvSpPr>
+          <p:nvPr>
+            <p:ph type="ctrTitle"/>
+          </p:nvPr>
+        </p:nvSpPr>
+        <p:spPr/>
+        <p:txBody>
+          <a:bodyPr/>
+          <a:lstStyle/>
+          <a:p>
+            <a:endParaRPr lang="en-SK" dirty="0"/>
+          </a:p>
+        </p:txBody>
+      </p:sp>
+      <p:sp>
+        <p:nvSpPr>
+          <p:cNvPr id="3" name="Subtitle 2">
+            <a:extLst>
+              <a:ext uri="{FF2B5EF4-FFF2-40B4-BE49-F238E27FC236}">
+                <a16:creationId xmlns:a16="http://schemas.microsoft.com/office/drawing/2014/main" id="{97EF2210-4D7B-54EB-B4CA-3D045AA10613}"/>
+              </a:ext>
+            </a:extLst>
+          </p:cNvPr>
+          <p:cNvSpPr>
+            <a:spLocks noGrp="1"/>
+          </p:cNvSpPr>
+          <p:nvPr>
+            <p:ph type="subTitle" idx="1"/>
+          </p:nvPr>
+        </p:nvSpPr>
+        <p:spPr/>
+        <p:txBody>
+          <a:bodyPr/>
+          <a:lstStyle/>
+          <a:p>
+            <a:r>
+              <a:rPr lang="en-SK" dirty="0"/>
+              <a:t>Sebastian Watzka a Karolina Rovna</a:t>
+            </a:r>
+          </a:p>
+        </p:txBody>
+      </p:sp>
+    </p:spTree>
+    <p:extLst>
+      <p:ext uri="{BB962C8B-B14F-4D97-AF65-F5344CB8AC3E}">
+        <p14:creationId xmlns:p14="http://schemas.microsoft.com/office/powerpoint/2010/main" val="3547119760"/>
+      </p:ext>
+    </p:extLst>
+  </p:cSld>
+  <p:clrMapOvr>
+    <a:masterClrMapping/>
+  </p:clrMapOvr>
+</p:sld>
 </file>
 
 <file path=ppt/theme/theme1.xml><?xml version="1.0" encoding="utf-8"?>

--- a/presentation.pptx
+++ b/presentation.pptx
@@ -302,7 +302,7 @@
           <a:p>
             <a:fld id="{5BCAD085-E8A6-8845-BD4E-CB4CCA059FC4}" type="datetimeFigureOut">
               <a:rPr lang="en-US" smtClean="0"/>
-              <a:t>2/25/26</a:t>
+              <a:t>2/25/2026</a:t>
             </a:fld>
             <a:endParaRPr lang="en-US"/>
           </a:p>
@@ -470,7 +470,7 @@
           <a:p>
             <a:fld id="{5BCAD085-E8A6-8845-BD4E-CB4CCA059FC4}" type="datetimeFigureOut">
               <a:rPr lang="en-US" smtClean="0"/>
-              <a:t>2/25/26</a:t>
+              <a:t>2/25/2026</a:t>
             </a:fld>
             <a:endParaRPr lang="en-US"/>
           </a:p>
@@ -648,7 +648,7 @@
           <a:p>
             <a:fld id="{5BCAD085-E8A6-8845-BD4E-CB4CCA059FC4}" type="datetimeFigureOut">
               <a:rPr lang="en-US" smtClean="0"/>
-              <a:t>2/25/26</a:t>
+              <a:t>2/25/2026</a:t>
             </a:fld>
             <a:endParaRPr lang="en-US"/>
           </a:p>
@@ -816,7 +816,7 @@
           <a:p>
             <a:fld id="{5BCAD085-E8A6-8845-BD4E-CB4CCA059FC4}" type="datetimeFigureOut">
               <a:rPr lang="en-US" smtClean="0"/>
-              <a:t>2/25/26</a:t>
+              <a:t>2/25/2026</a:t>
             </a:fld>
             <a:endParaRPr lang="en-US"/>
           </a:p>
@@ -1061,7 +1061,7 @@
           <a:p>
             <a:fld id="{5BCAD085-E8A6-8845-BD4E-CB4CCA059FC4}" type="datetimeFigureOut">
               <a:rPr lang="en-US" smtClean="0"/>
-              <a:t>2/25/26</a:t>
+              <a:t>2/25/2026</a:t>
             </a:fld>
             <a:endParaRPr lang="en-US"/>
           </a:p>
@@ -1346,7 +1346,7 @@
           <a:p>
             <a:fld id="{5BCAD085-E8A6-8845-BD4E-CB4CCA059FC4}" type="datetimeFigureOut">
               <a:rPr lang="en-US" smtClean="0"/>
-              <a:t>2/25/26</a:t>
+              <a:t>2/25/2026</a:t>
             </a:fld>
             <a:endParaRPr lang="en-US"/>
           </a:p>
@@ -1765,7 +1765,7 @@
           <a:p>
             <a:fld id="{5BCAD085-E8A6-8845-BD4E-CB4CCA059FC4}" type="datetimeFigureOut">
               <a:rPr lang="en-US" smtClean="0"/>
-              <a:t>2/25/26</a:t>
+              <a:t>2/25/2026</a:t>
             </a:fld>
             <a:endParaRPr lang="en-US"/>
           </a:p>
@@ -1882,7 +1882,7 @@
           <a:p>
             <a:fld id="{5BCAD085-E8A6-8845-BD4E-CB4CCA059FC4}" type="datetimeFigureOut">
               <a:rPr lang="en-US" smtClean="0"/>
-              <a:t>2/25/26</a:t>
+              <a:t>2/25/2026</a:t>
             </a:fld>
             <a:endParaRPr lang="en-US"/>
           </a:p>
@@ -1977,7 +1977,7 @@
           <a:p>
             <a:fld id="{5BCAD085-E8A6-8845-BD4E-CB4CCA059FC4}" type="datetimeFigureOut">
               <a:rPr lang="en-US" smtClean="0"/>
-              <a:t>2/25/26</a:t>
+              <a:t>2/25/2026</a:t>
             </a:fld>
             <a:endParaRPr lang="en-US"/>
           </a:p>
@@ -2252,7 +2252,7 @@
           <a:p>
             <a:fld id="{5BCAD085-E8A6-8845-BD4E-CB4CCA059FC4}" type="datetimeFigureOut">
               <a:rPr lang="en-US" smtClean="0"/>
-              <a:t>2/25/26</a:t>
+              <a:t>2/25/2026</a:t>
             </a:fld>
             <a:endParaRPr lang="en-US"/>
           </a:p>
@@ -2504,7 +2504,7 @@
           <a:p>
             <a:fld id="{5BCAD085-E8A6-8845-BD4E-CB4CCA059FC4}" type="datetimeFigureOut">
               <a:rPr lang="en-US" smtClean="0"/>
-              <a:t>2/25/26</a:t>
+              <a:t>2/25/2026</a:t>
             </a:fld>
             <a:endParaRPr lang="en-US"/>
           </a:p>
@@ -2715,7 +2715,7 @@
           <a:p>
             <a:fld id="{5BCAD085-E8A6-8845-BD4E-CB4CCA059FC4}" type="datetimeFigureOut">
               <a:rPr lang="en-US" smtClean="0"/>
-              <a:t>2/25/26</a:t>
+              <a:t>2/25/2026</a:t>
             </a:fld>
             <a:endParaRPr lang="en-US"/>
           </a:p>
@@ -3111,6 +3111,26 @@
           <a:bodyPr/>
           <a:lstStyle/>
           <a:p>
+            <a:r>
+              <a:rPr lang="sk-SK" dirty="0" err="1"/>
+              <a:t>The</a:t>
+            </a:r>
+            <a:r>
+              <a:rPr lang="sk-SK" dirty="0"/>
+              <a:t> </a:t>
+            </a:r>
+            <a:r>
+              <a:rPr lang="sk-SK" dirty="0" err="1"/>
+              <a:t>Bourbon</a:t>
+            </a:r>
+            <a:r>
+              <a:rPr lang="sk-SK" dirty="0"/>
+              <a:t> </a:t>
+            </a:r>
+            <a:r>
+              <a:rPr lang="sk-SK" dirty="0" err="1"/>
+              <a:t>Room</a:t>
+            </a:r>
             <a:endParaRPr lang="en-SK" dirty="0"/>
           </a:p>
         </p:txBody>

--- a/presentation.pptx
+++ b/presentation.pptx
@@ -3076,6 +3076,16 @@
 <file path=ppt/slides/slide1.xml><?xml version="1.0" encoding="utf-8"?>
 <p:sld xmlns:a="http://schemas.openxmlformats.org/drawingml/2006/main" xmlns:r="http://schemas.openxmlformats.org/officeDocument/2006/relationships" xmlns:p="http://schemas.openxmlformats.org/presentationml/2006/main">
   <p:cSld>
+    <p:bg>
+      <p:bgPr>
+        <a:solidFill>
+          <a:schemeClr val="accent2">
+            <a:lumMod val="75000"/>
+          </a:schemeClr>
+        </a:solidFill>
+        <a:effectLst/>
+      </p:bgPr>
+    </p:bg>
     <p:spTree>
       <p:nvGrpSpPr>
         <p:cNvPr id="1" name=""/>
@@ -3112,26 +3122,50 @@
           <a:lstStyle/>
           <a:p>
             <a:r>
-              <a:rPr lang="sk-SK" dirty="0" err="1"/>
+              <a:rPr lang="sk-SK" dirty="0" err="1">
+                <a:solidFill>
+                  <a:schemeClr val="bg1"/>
+                </a:solidFill>
+              </a:rPr>
               <a:t>The</a:t>
             </a:r>
             <a:r>
-              <a:rPr lang="sk-SK" dirty="0"/>
+              <a:rPr lang="sk-SK" dirty="0">
+                <a:solidFill>
+                  <a:schemeClr val="bg1"/>
+                </a:solidFill>
+              </a:rPr>
               <a:t> </a:t>
             </a:r>
             <a:r>
-              <a:rPr lang="sk-SK" dirty="0" err="1"/>
+              <a:rPr lang="sk-SK" dirty="0" err="1">
+                <a:solidFill>
+                  <a:schemeClr val="bg1"/>
+                </a:solidFill>
+              </a:rPr>
               <a:t>Bourbon</a:t>
             </a:r>
             <a:r>
-              <a:rPr lang="sk-SK" dirty="0"/>
+              <a:rPr lang="sk-SK" dirty="0">
+                <a:solidFill>
+                  <a:schemeClr val="bg1"/>
+                </a:solidFill>
+              </a:rPr>
               <a:t> </a:t>
             </a:r>
             <a:r>
-              <a:rPr lang="sk-SK" dirty="0" err="1"/>
+              <a:rPr lang="sk-SK" dirty="0" err="1">
+                <a:solidFill>
+                  <a:schemeClr val="bg1"/>
+                </a:solidFill>
+              </a:rPr>
               <a:t>Room</a:t>
             </a:r>
-            <a:endParaRPr lang="en-SK" dirty="0"/>
+            <a:endParaRPr lang="en-SK" dirty="0">
+              <a:solidFill>
+                <a:schemeClr val="bg1"/>
+              </a:solidFill>
+            </a:endParaRPr>
           </a:p>
         </p:txBody>
       </p:sp>

--- a/presentation.pptx
+++ b/presentation.pptx
@@ -6,6 +6,7 @@
   </p:sldMasterIdLst>
   <p:sldIdLst>
     <p:sldId id="256" r:id="rId2"/>
+    <p:sldId id="257" r:id="rId3"/>
   </p:sldIdLst>
   <p:sldSz cx="9144000" cy="6858000" type="screen4x3"/>
   <p:notesSz cx="6858000" cy="9144000"/>
@@ -302,7 +303,7 @@
           <a:p>
             <a:fld id="{5BCAD085-E8A6-8845-BD4E-CB4CCA059FC4}" type="datetimeFigureOut">
               <a:rPr lang="en-US" smtClean="0"/>
-              <a:t>2/25/2026</a:t>
+              <a:t>2/27/2026</a:t>
             </a:fld>
             <a:endParaRPr lang="en-US"/>
           </a:p>
@@ -470,7 +471,7 @@
           <a:p>
             <a:fld id="{5BCAD085-E8A6-8845-BD4E-CB4CCA059FC4}" type="datetimeFigureOut">
               <a:rPr lang="en-US" smtClean="0"/>
-              <a:t>2/25/2026</a:t>
+              <a:t>2/27/2026</a:t>
             </a:fld>
             <a:endParaRPr lang="en-US"/>
           </a:p>
@@ -648,7 +649,7 @@
           <a:p>
             <a:fld id="{5BCAD085-E8A6-8845-BD4E-CB4CCA059FC4}" type="datetimeFigureOut">
               <a:rPr lang="en-US" smtClean="0"/>
-              <a:t>2/25/2026</a:t>
+              <a:t>2/27/2026</a:t>
             </a:fld>
             <a:endParaRPr lang="en-US"/>
           </a:p>
@@ -816,7 +817,7 @@
           <a:p>
             <a:fld id="{5BCAD085-E8A6-8845-BD4E-CB4CCA059FC4}" type="datetimeFigureOut">
               <a:rPr lang="en-US" smtClean="0"/>
-              <a:t>2/25/2026</a:t>
+              <a:t>2/27/2026</a:t>
             </a:fld>
             <a:endParaRPr lang="en-US"/>
           </a:p>
@@ -1061,7 +1062,7 @@
           <a:p>
             <a:fld id="{5BCAD085-E8A6-8845-BD4E-CB4CCA059FC4}" type="datetimeFigureOut">
               <a:rPr lang="en-US" smtClean="0"/>
-              <a:t>2/25/2026</a:t>
+              <a:t>2/27/2026</a:t>
             </a:fld>
             <a:endParaRPr lang="en-US"/>
           </a:p>
@@ -1346,7 +1347,7 @@
           <a:p>
             <a:fld id="{5BCAD085-E8A6-8845-BD4E-CB4CCA059FC4}" type="datetimeFigureOut">
               <a:rPr lang="en-US" smtClean="0"/>
-              <a:t>2/25/2026</a:t>
+              <a:t>2/27/2026</a:t>
             </a:fld>
             <a:endParaRPr lang="en-US"/>
           </a:p>
@@ -1765,7 +1766,7 @@
           <a:p>
             <a:fld id="{5BCAD085-E8A6-8845-BD4E-CB4CCA059FC4}" type="datetimeFigureOut">
               <a:rPr lang="en-US" smtClean="0"/>
-              <a:t>2/25/2026</a:t>
+              <a:t>2/27/2026</a:t>
             </a:fld>
             <a:endParaRPr lang="en-US"/>
           </a:p>
@@ -1882,7 +1883,7 @@
           <a:p>
             <a:fld id="{5BCAD085-E8A6-8845-BD4E-CB4CCA059FC4}" type="datetimeFigureOut">
               <a:rPr lang="en-US" smtClean="0"/>
-              <a:t>2/25/2026</a:t>
+              <a:t>2/27/2026</a:t>
             </a:fld>
             <a:endParaRPr lang="en-US"/>
           </a:p>
@@ -1977,7 +1978,7 @@
           <a:p>
             <a:fld id="{5BCAD085-E8A6-8845-BD4E-CB4CCA059FC4}" type="datetimeFigureOut">
               <a:rPr lang="en-US" smtClean="0"/>
-              <a:t>2/25/2026</a:t>
+              <a:t>2/27/2026</a:t>
             </a:fld>
             <a:endParaRPr lang="en-US"/>
           </a:p>
@@ -2252,7 +2253,7 @@
           <a:p>
             <a:fld id="{5BCAD085-E8A6-8845-BD4E-CB4CCA059FC4}" type="datetimeFigureOut">
               <a:rPr lang="en-US" smtClean="0"/>
-              <a:t>2/25/2026</a:t>
+              <a:t>2/27/2026</a:t>
             </a:fld>
             <a:endParaRPr lang="en-US"/>
           </a:p>
@@ -2504,7 +2505,7 @@
           <a:p>
             <a:fld id="{5BCAD085-E8A6-8845-BD4E-CB4CCA059FC4}" type="datetimeFigureOut">
               <a:rPr lang="en-US" smtClean="0"/>
-              <a:t>2/25/2026</a:t>
+              <a:t>2/27/2026</a:t>
             </a:fld>
             <a:endParaRPr lang="en-US"/>
           </a:p>
@@ -2715,7 +2716,7 @@
           <a:p>
             <a:fld id="{5BCAD085-E8A6-8845-BD4E-CB4CCA059FC4}" type="datetimeFigureOut">
               <a:rPr lang="en-US" smtClean="0"/>
-              <a:t>2/25/2026</a:t>
+              <a:t>2/27/2026</a:t>
             </a:fld>
             <a:endParaRPr lang="en-US"/>
           </a:p>
@@ -3079,9 +3080,7 @@
     <p:bg>
       <p:bgPr>
         <a:solidFill>
-          <a:schemeClr val="accent2">
-            <a:lumMod val="75000"/>
-          </a:schemeClr>
+          <a:srgbClr val="1B2A30"/>
         </a:solidFill>
         <a:effectLst/>
       </p:bgPr>
@@ -3100,6 +3099,35 @@
           <a:chExt cx="0" cy="0"/>
         </a:xfrm>
       </p:grpSpPr>
+      <p:pic>
+        <p:nvPicPr>
+          <p:cNvPr id="8" name="Obrázok 7">
+            <a:extLst>
+              <a:ext uri="{FF2B5EF4-FFF2-40B4-BE49-F238E27FC236}">
+                <a16:creationId xmlns:a16="http://schemas.microsoft.com/office/drawing/2014/main" id="{4E6FCD25-8879-FD7C-E405-9ACD4B29462B}"/>
+              </a:ext>
+            </a:extLst>
+          </p:cNvPr>
+          <p:cNvPicPr>
+            <a:picLocks noChangeAspect="1"/>
+          </p:cNvPicPr>
+          <p:nvPr/>
+        </p:nvPicPr>
+        <p:blipFill>
+          <a:blip r:embed="rId2"/>
+          <a:srcRect t="1536" b="1536"/>
+          <a:stretch/>
+        </p:blipFill>
+        <p:spPr>
+          <a:xfrm rot="16200000">
+            <a:off x="1143001" y="-1143000"/>
+            <a:ext cx="6858000" cy="9143999"/>
+          </a:xfrm>
+          <a:prstGeom prst="rect">
+            <a:avLst/>
+          </a:prstGeom>
+        </p:spPr>
+      </p:pic>
       <p:sp>
         <p:nvSpPr>
           <p:cNvPr id="2" name="Title 1">
@@ -3118,53 +3146,25 @@
         </p:nvSpPr>
         <p:spPr/>
         <p:txBody>
-          <a:bodyPr/>
-          <a:lstStyle/>
-          <a:p>
-            <a:r>
-              <a:rPr lang="sk-SK" dirty="0" err="1">
+          <a:bodyPr>
+            <a:noAutofit/>
+          </a:bodyPr>
+          <a:lstStyle/>
+          <a:p>
+            <a:r>
+              <a:rPr lang="sk-SK" sz="5400" dirty="0">
                 <a:solidFill>
-                  <a:schemeClr val="bg1"/>
+                  <a:srgbClr val="B06821"/>
                 </a:solidFill>
+                <a:latin typeface="Primitive" panose="00000400000000000000" pitchFamily="2" charset="0"/>
               </a:rPr>
-              <a:t>The</a:t>
-            </a:r>
-            <a:r>
-              <a:rPr lang="sk-SK" dirty="0">
-                <a:solidFill>
-                  <a:schemeClr val="bg1"/>
-                </a:solidFill>
-              </a:rPr>
-              <a:t> </a:t>
-            </a:r>
-            <a:r>
-              <a:rPr lang="sk-SK" dirty="0" err="1">
-                <a:solidFill>
-                  <a:schemeClr val="bg1"/>
-                </a:solidFill>
-              </a:rPr>
-              <a:t>Bourbon</a:t>
-            </a:r>
-            <a:r>
-              <a:rPr lang="sk-SK" dirty="0">
-                <a:solidFill>
-                  <a:schemeClr val="bg1"/>
-                </a:solidFill>
-              </a:rPr>
-              <a:t> </a:t>
-            </a:r>
-            <a:r>
-              <a:rPr lang="sk-SK" dirty="0" err="1">
-                <a:solidFill>
-                  <a:schemeClr val="bg1"/>
-                </a:solidFill>
-              </a:rPr>
-              <a:t>Room</a:t>
-            </a:r>
-            <a:endParaRPr lang="en-SK" dirty="0">
+              <a:t>The Bourbon Room</a:t>
+            </a:r>
+            <a:endParaRPr lang="en-SK" sz="5400" dirty="0">
               <a:solidFill>
-                <a:schemeClr val="bg1"/>
+                <a:srgbClr val="B06821"/>
               </a:solidFill>
+              <a:latin typeface="Primitive" panose="00000400000000000000" pitchFamily="2" charset="0"/>
             </a:endParaRPr>
           </a:p>
         </p:txBody>
@@ -3185,22 +3185,391 @@
             <p:ph type="subTitle" idx="1"/>
           </p:nvPr>
         </p:nvSpPr>
-        <p:spPr/>
-        <p:txBody>
-          <a:bodyPr/>
-          <a:lstStyle/>
-          <a:p>
-            <a:r>
-              <a:rPr lang="en-SK" dirty="0"/>
-              <a:t>Sebastian Watzka a Karolina Rovna</a:t>
-            </a:r>
-          </a:p>
-        </p:txBody>
-      </p:sp>
+        <p:spPr>
+          <a:xfrm>
+            <a:off x="1371600" y="792018"/>
+            <a:ext cx="6400800" cy="556492"/>
+          </a:xfrm>
+        </p:spPr>
+        <p:txBody>
+          <a:bodyPr>
+            <a:normAutofit lnSpcReduction="10000"/>
+          </a:bodyPr>
+          <a:lstStyle/>
+          <a:p>
+            <a:r>
+              <a:rPr lang="sk-SK" dirty="0">
+                <a:solidFill>
+                  <a:srgbClr val="F1D3B5"/>
+                </a:solidFill>
+                <a:latin typeface="Candara Light" panose="020E0502030303020204" pitchFamily="34" charset="0"/>
+              </a:rPr>
+              <a:t>podnikateľský plán</a:t>
+            </a:r>
+            <a:endParaRPr lang="en-SK" dirty="0">
+              <a:solidFill>
+                <a:srgbClr val="F1D3B5"/>
+              </a:solidFill>
+              <a:latin typeface="Candara Light" panose="020E0502030303020204" pitchFamily="34" charset="0"/>
+            </a:endParaRPr>
+          </a:p>
+        </p:txBody>
+      </p:sp>
+      <p:sp>
+        <p:nvSpPr>
+          <p:cNvPr id="4" name="Subtitle 2">
+            <a:extLst>
+              <a:ext uri="{FF2B5EF4-FFF2-40B4-BE49-F238E27FC236}">
+                <a16:creationId xmlns:a16="http://schemas.microsoft.com/office/drawing/2014/main" id="{B564C436-FC44-9BD5-4326-A4D9FB18837B}"/>
+              </a:ext>
+            </a:extLst>
+          </p:cNvPr>
+          <p:cNvSpPr txBox="1">
+            <a:spLocks/>
+          </p:cNvSpPr>
+          <p:nvPr/>
+        </p:nvSpPr>
+        <p:spPr>
+          <a:xfrm>
+            <a:off x="1371600" y="3594644"/>
+            <a:ext cx="6400800" cy="736600"/>
+          </a:xfrm>
+          <a:prstGeom prst="rect">
+            <a:avLst/>
+          </a:prstGeom>
+        </p:spPr>
+        <p:txBody>
+          <a:bodyPr vert="horz" lIns="91440" tIns="45720" rIns="91440" bIns="45720" rtlCol="0">
+            <a:normAutofit/>
+          </a:bodyPr>
+          <a:lstStyle>
+            <a:lvl1pPr marL="0" indent="0" algn="ctr" defTabSz="457200" rtl="0" eaLnBrk="1" latinLnBrk="0" hangingPunct="1">
+              <a:spcBef>
+                <a:spcPct val="20000"/>
+              </a:spcBef>
+              <a:buFont typeface="Arial"/>
+              <a:buNone/>
+              <a:defRPr sz="3200" kern="1200">
+                <a:solidFill>
+                  <a:schemeClr val="tx1">
+                    <a:tint val="75000"/>
+                  </a:schemeClr>
+                </a:solidFill>
+                <a:latin typeface="+mn-lt"/>
+                <a:ea typeface="+mn-ea"/>
+                <a:cs typeface="+mn-cs"/>
+              </a:defRPr>
+            </a:lvl1pPr>
+            <a:lvl2pPr marL="457200" indent="0" algn="ctr" defTabSz="457200" rtl="0" eaLnBrk="1" latinLnBrk="0" hangingPunct="1">
+              <a:spcBef>
+                <a:spcPct val="20000"/>
+              </a:spcBef>
+              <a:buFont typeface="Arial"/>
+              <a:buNone/>
+              <a:defRPr sz="2800" kern="1200">
+                <a:solidFill>
+                  <a:schemeClr val="tx1">
+                    <a:tint val="75000"/>
+                  </a:schemeClr>
+                </a:solidFill>
+                <a:latin typeface="+mn-lt"/>
+                <a:ea typeface="+mn-ea"/>
+                <a:cs typeface="+mn-cs"/>
+              </a:defRPr>
+            </a:lvl2pPr>
+            <a:lvl3pPr marL="914400" indent="0" algn="ctr" defTabSz="457200" rtl="0" eaLnBrk="1" latinLnBrk="0" hangingPunct="1">
+              <a:spcBef>
+                <a:spcPct val="20000"/>
+              </a:spcBef>
+              <a:buFont typeface="Arial"/>
+              <a:buNone/>
+              <a:defRPr sz="2400" kern="1200">
+                <a:solidFill>
+                  <a:schemeClr val="tx1">
+                    <a:tint val="75000"/>
+                  </a:schemeClr>
+                </a:solidFill>
+                <a:latin typeface="+mn-lt"/>
+                <a:ea typeface="+mn-ea"/>
+                <a:cs typeface="+mn-cs"/>
+              </a:defRPr>
+            </a:lvl3pPr>
+            <a:lvl4pPr marL="1371600" indent="0" algn="ctr" defTabSz="457200" rtl="0" eaLnBrk="1" latinLnBrk="0" hangingPunct="1">
+              <a:spcBef>
+                <a:spcPct val="20000"/>
+              </a:spcBef>
+              <a:buFont typeface="Arial"/>
+              <a:buNone/>
+              <a:defRPr sz="2000" kern="1200">
+                <a:solidFill>
+                  <a:schemeClr val="tx1">
+                    <a:tint val="75000"/>
+                  </a:schemeClr>
+                </a:solidFill>
+                <a:latin typeface="+mn-lt"/>
+                <a:ea typeface="+mn-ea"/>
+                <a:cs typeface="+mn-cs"/>
+              </a:defRPr>
+            </a:lvl4pPr>
+            <a:lvl5pPr marL="1828800" indent="0" algn="ctr" defTabSz="457200" rtl="0" eaLnBrk="1" latinLnBrk="0" hangingPunct="1">
+              <a:spcBef>
+                <a:spcPct val="20000"/>
+              </a:spcBef>
+              <a:buFont typeface="Arial"/>
+              <a:buNone/>
+              <a:defRPr sz="2000" kern="1200">
+                <a:solidFill>
+                  <a:schemeClr val="tx1">
+                    <a:tint val="75000"/>
+                  </a:schemeClr>
+                </a:solidFill>
+                <a:latin typeface="+mn-lt"/>
+                <a:ea typeface="+mn-ea"/>
+                <a:cs typeface="+mn-cs"/>
+              </a:defRPr>
+            </a:lvl5pPr>
+            <a:lvl6pPr marL="2286000" indent="0" algn="ctr" defTabSz="457200" rtl="0" eaLnBrk="1" latinLnBrk="0" hangingPunct="1">
+              <a:spcBef>
+                <a:spcPct val="20000"/>
+              </a:spcBef>
+              <a:buFont typeface="Arial"/>
+              <a:buNone/>
+              <a:defRPr sz="2000" kern="1200">
+                <a:solidFill>
+                  <a:schemeClr val="tx1">
+                    <a:tint val="75000"/>
+                  </a:schemeClr>
+                </a:solidFill>
+                <a:latin typeface="+mn-lt"/>
+                <a:ea typeface="+mn-ea"/>
+                <a:cs typeface="+mn-cs"/>
+              </a:defRPr>
+            </a:lvl6pPr>
+            <a:lvl7pPr marL="2743200" indent="0" algn="ctr" defTabSz="457200" rtl="0" eaLnBrk="1" latinLnBrk="0" hangingPunct="1">
+              <a:spcBef>
+                <a:spcPct val="20000"/>
+              </a:spcBef>
+              <a:buFont typeface="Arial"/>
+              <a:buNone/>
+              <a:defRPr sz="2000" kern="1200">
+                <a:solidFill>
+                  <a:schemeClr val="tx1">
+                    <a:tint val="75000"/>
+                  </a:schemeClr>
+                </a:solidFill>
+                <a:latin typeface="+mn-lt"/>
+                <a:ea typeface="+mn-ea"/>
+                <a:cs typeface="+mn-cs"/>
+              </a:defRPr>
+            </a:lvl7pPr>
+            <a:lvl8pPr marL="3200400" indent="0" algn="ctr" defTabSz="457200" rtl="0" eaLnBrk="1" latinLnBrk="0" hangingPunct="1">
+              <a:spcBef>
+                <a:spcPct val="20000"/>
+              </a:spcBef>
+              <a:buFont typeface="Arial"/>
+              <a:buNone/>
+              <a:defRPr sz="2000" kern="1200">
+                <a:solidFill>
+                  <a:schemeClr val="tx1">
+                    <a:tint val="75000"/>
+                  </a:schemeClr>
+                </a:solidFill>
+                <a:latin typeface="+mn-lt"/>
+                <a:ea typeface="+mn-ea"/>
+                <a:cs typeface="+mn-cs"/>
+              </a:defRPr>
+            </a:lvl8pPr>
+            <a:lvl9pPr marL="3657600" indent="0" algn="ctr" defTabSz="457200" rtl="0" eaLnBrk="1" latinLnBrk="0" hangingPunct="1">
+              <a:spcBef>
+                <a:spcPct val="20000"/>
+              </a:spcBef>
+              <a:buFont typeface="Arial"/>
+              <a:buNone/>
+              <a:defRPr sz="2000" kern="1200">
+                <a:solidFill>
+                  <a:schemeClr val="tx1">
+                    <a:tint val="75000"/>
+                  </a:schemeClr>
+                </a:solidFill>
+                <a:latin typeface="+mn-lt"/>
+                <a:ea typeface="+mn-ea"/>
+                <a:cs typeface="+mn-cs"/>
+              </a:defRPr>
+            </a:lvl9pPr>
+          </a:lstStyle>
+          <a:p>
+            <a:r>
+              <a:rPr lang="sk-SK" sz="4000" dirty="0">
+                <a:solidFill>
+                  <a:srgbClr val="F1D3B5"/>
+                </a:solidFill>
+                <a:latin typeface="Candara Light" panose="020E0502030303020204" pitchFamily="34" charset="0"/>
+              </a:rPr>
+              <a:t>hudobný klub</a:t>
+            </a:r>
+            <a:endParaRPr lang="en-SK" sz="4000" dirty="0">
+              <a:solidFill>
+                <a:srgbClr val="F1D3B5"/>
+              </a:solidFill>
+              <a:latin typeface="Candara Light" panose="020E0502030303020204" pitchFamily="34" charset="0"/>
+            </a:endParaRPr>
+          </a:p>
+        </p:txBody>
+      </p:sp>
+      <p:cxnSp>
+        <p:nvCxnSpPr>
+          <p:cNvPr id="12" name="Rovná spojnica 11">
+            <a:extLst>
+              <a:ext uri="{FF2B5EF4-FFF2-40B4-BE49-F238E27FC236}">
+                <a16:creationId xmlns:a16="http://schemas.microsoft.com/office/drawing/2014/main" id="{ACE269C0-CE10-7D5C-4B47-E4075B348615}"/>
+              </a:ext>
+            </a:extLst>
+          </p:cNvPr>
+          <p:cNvCxnSpPr/>
+          <p:nvPr/>
+        </p:nvCxnSpPr>
+        <p:spPr>
+          <a:xfrm>
+            <a:off x="2290354" y="3437708"/>
+            <a:ext cx="4572000" cy="0"/>
+          </a:xfrm>
+          <a:prstGeom prst="line">
+            <a:avLst/>
+          </a:prstGeom>
+          <a:ln>
+            <a:solidFill>
+              <a:srgbClr val="B06821"/>
+            </a:solidFill>
+          </a:ln>
+        </p:spPr>
+        <p:style>
+          <a:lnRef idx="2">
+            <a:schemeClr val="accent1"/>
+          </a:lnRef>
+          <a:fillRef idx="0">
+            <a:schemeClr val="accent1"/>
+          </a:fillRef>
+          <a:effectRef idx="1">
+            <a:schemeClr val="accent1"/>
+          </a:effectRef>
+          <a:fontRef idx="minor">
+            <a:schemeClr val="tx1"/>
+          </a:fontRef>
+        </p:style>
+      </p:cxnSp>
+      <p:cxnSp>
+        <p:nvCxnSpPr>
+          <p:cNvPr id="13" name="Rovná spojnica 12">
+            <a:extLst>
+              <a:ext uri="{FF2B5EF4-FFF2-40B4-BE49-F238E27FC236}">
+                <a16:creationId xmlns:a16="http://schemas.microsoft.com/office/drawing/2014/main" id="{EF354AC0-6933-ABB8-55E6-D2515C12AD92}"/>
+              </a:ext>
+            </a:extLst>
+          </p:cNvPr>
+          <p:cNvCxnSpPr/>
+          <p:nvPr/>
+        </p:nvCxnSpPr>
+        <p:spPr>
+          <a:xfrm>
+            <a:off x="2286000" y="2362199"/>
+            <a:ext cx="4572000" cy="0"/>
+          </a:xfrm>
+          <a:prstGeom prst="line">
+            <a:avLst/>
+          </a:prstGeom>
+          <a:ln>
+            <a:solidFill>
+              <a:srgbClr val="B06821"/>
+            </a:solidFill>
+          </a:ln>
+        </p:spPr>
+        <p:style>
+          <a:lnRef idx="2">
+            <a:schemeClr val="accent1"/>
+          </a:lnRef>
+          <a:fillRef idx="0">
+            <a:schemeClr val="accent1"/>
+          </a:fillRef>
+          <a:effectRef idx="1">
+            <a:schemeClr val="accent1"/>
+          </a:effectRef>
+          <a:fontRef idx="minor">
+            <a:schemeClr val="tx1"/>
+          </a:fontRef>
+        </p:style>
+      </p:cxnSp>
     </p:spTree>
     <p:extLst>
       <p:ext uri="{BB962C8B-B14F-4D97-AF65-F5344CB8AC3E}">
         <p14:creationId xmlns:p14="http://schemas.microsoft.com/office/powerpoint/2010/main" val="3547119760"/>
+      </p:ext>
+    </p:extLst>
+  </p:cSld>
+  <p:clrMapOvr>
+    <a:masterClrMapping/>
+  </p:clrMapOvr>
+</p:sld>
+</file>
+
+<file path=ppt/slides/slide2.xml><?xml version="1.0" encoding="utf-8"?>
+<p:sld xmlns:a="http://schemas.openxmlformats.org/drawingml/2006/main" xmlns:r="http://schemas.openxmlformats.org/officeDocument/2006/relationships" xmlns:p="http://schemas.openxmlformats.org/presentationml/2006/main">
+  <p:cSld>
+    <p:bg>
+      <p:bgPr>
+        <a:solidFill>
+          <a:srgbClr val="1B2A30"/>
+        </a:solidFill>
+        <a:effectLst/>
+      </p:bgPr>
+    </p:bg>
+    <p:spTree>
+      <p:nvGrpSpPr>
+        <p:cNvPr id="1" name=""/>
+        <p:cNvGrpSpPr/>
+        <p:nvPr/>
+      </p:nvGrpSpPr>
+      <p:grpSpPr>
+        <a:xfrm>
+          <a:off x="0" y="0"/>
+          <a:ext cx="0" cy="0"/>
+          <a:chOff x="0" y="0"/>
+          <a:chExt cx="0" cy="0"/>
+        </a:xfrm>
+      </p:grpSpPr>
+      <p:pic>
+        <p:nvPicPr>
+          <p:cNvPr id="3" name="Obrázok 2">
+            <a:extLst>
+              <a:ext uri="{FF2B5EF4-FFF2-40B4-BE49-F238E27FC236}">
+                <a16:creationId xmlns:a16="http://schemas.microsoft.com/office/drawing/2014/main" id="{DAC24015-A241-9617-1669-B3D9FC234386}"/>
+              </a:ext>
+            </a:extLst>
+          </p:cNvPr>
+          <p:cNvPicPr>
+            <a:picLocks noChangeAspect="1"/>
+          </p:cNvPicPr>
+          <p:nvPr/>
+        </p:nvPicPr>
+        <p:blipFill>
+          <a:blip r:embed="rId2"/>
+          <a:stretch>
+            <a:fillRect/>
+          </a:stretch>
+        </p:blipFill>
+        <p:spPr>
+          <a:xfrm>
+            <a:off x="2494246" y="0"/>
+            <a:ext cx="4155507" cy="6858000"/>
+          </a:xfrm>
+          <a:prstGeom prst="rect">
+            <a:avLst/>
+          </a:prstGeom>
+        </p:spPr>
+      </p:pic>
+    </p:spTree>
+    <p:extLst>
+      <p:ext uri="{BB962C8B-B14F-4D97-AF65-F5344CB8AC3E}">
+        <p14:creationId xmlns:p14="http://schemas.microsoft.com/office/powerpoint/2010/main" val="2210645300"/>
       </p:ext>
     </p:extLst>
   </p:cSld>
